--- a/docs/materials/[통과2]_과학과미래사회_AI융합_2차시교안_v1.pptx
+++ b/docs/materials/[통과2]_과학과미래사회_AI융합_2차시교안_v1.pptx
@@ -117,7 +117,7 @@
   <p:extLst>
     <p:ext uri="{521415D9-36F7-43E2-AB2F-B90AF26B5E84}">
       <p14:sectionLst xmlns:p14="http://schemas.microsoft.com/office/powerpoint/2010/main">
-        <p14:section name="도입" id="{e974c89b-d785-035a-466f-d18555af8ed0}">
+        <p14:section name="도입" id="{9fb8a28f-c724-5b24-5b81-f658c69e3925}">
           <p14:sldIdLst>
             <p14:sldId id="256"/>
             <p14:sldId id="257"/>
@@ -125,7 +125,7 @@
             <p14:sldId id="259"/>
           </p14:sldIdLst>
         </p14:section>
-        <p14:section name="전개" id="{d339094b-1f04-1ac6-1f88-e12ba8b2dbf4}">
+        <p14:section name="전개" id="{d59f5a35-26d4-9d30-1d9f-042586ba9653}">
           <p14:sldIdLst>
             <p14:sldId id="260"/>
             <p14:sldId id="261"/>
@@ -134,7 +134,7 @@
             <p14:sldId id="264"/>
           </p14:sldIdLst>
         </p14:section>
-        <p14:section name="정리" id="{390a50f4-43c7-5893-17c8-c8e150db04a3}">
+        <p14:section name="정리" id="{808c300f-98be-b659-2dbc-37ec01d67b44}">
           <p14:sldIdLst>
             <p14:sldId id="265"/>
             <p14:sldId id="266"/>
@@ -6660,7 +6660,7 @@
                   <a:schemeClr val="accent3"/>
                 </a:solidFill>
               </a:rPr>
-              <a:t>데이터: 기상청 ASOS 서울(108) 시간자료 중 학습 기간(2016–2022)만 사용 · 판정 기준은 수업용(통계적 검정 아님) · 조건 시간 50개 미만은 판단 보류</a:t>
+              <a:t>데이터: 기상청 ASOS 서울(108) 시간자료 중 공부 기간(2016–2022)만 사용 · 판정 기준은 수업용(통계적 검정 아님) · 조건 시간 50개 미만은 판단 보류</a:t>
             </a:r>
             <a:endParaRPr lang="en-US" sz="1200" dirty="0"/>
           </a:p>
@@ -7119,7 +7119,7 @@
                   <a:schemeClr val="tx2"/>
                 </a:solidFill>
               </a:rPr>
-              <a:t>학습 2016–2022</a:t>
+              <a:t>📘 공부 기간 2016–2022 (AI가 보고 배움)</a:t>
             </a:r>
             <a:endParaRPr lang="en-US" sz="1400" dirty="0"/>
           </a:p>
@@ -7180,7 +7180,7 @@
                   <a:schemeClr val="bg1"/>
                 </a:solidFill>
               </a:rPr>
-              <a:t>시험 2023–2025</a:t>
+              <a:t>🎯 대결 기간 2023–2025</a:t>
             </a:r>
             <a:endParaRPr lang="en-US" sz="1400" dirty="0"/>
           </a:p>
@@ -7216,7 +7216,7 @@
                   <a:schemeClr val="accent3"/>
                 </a:solidFill>
               </a:rPr>
-              <a:t>규칙(03 검증)과 AI 모두 학습 기간만 보고 만들고, 둘 다 처음 보는 기간으로 시험</a:t>
+              <a:t>규칙(03 검증)과 AI 모두 공부 기간만 보고 만들고, 둘 다 처음 보는 대결 기간으로 겨룸</a:t>
             </a:r>
             <a:endParaRPr lang="en-US" sz="1300" dirty="0"/>
           </a:p>
